--- a/Paper/报告/9_Docker.pptx
+++ b/Paper/报告/9_Docker.pptx
@@ -218,7 +218,7 @@
           <a:p>
             <a:fld id="{8DBAFB0F-6192-48FE-99AC-AF225DC028A7}" type="datetimeFigureOut">
               <a:rPr lang="zh-CN" altLang="en-US" smtClean="0"/>
-              <a:t>2024/6/3</a:t>
+              <a:t>2024/6/26</a:t>
             </a:fld>
             <a:endParaRPr lang="zh-CN" altLang="en-US"/>
           </a:p>
@@ -884,7 +884,7 @@
           <a:p>
             <a:fld id="{B3A1CB8A-CC46-473E-BAED-B264D45A45B1}" type="datetimeFigureOut">
               <a:rPr lang="zh-CN" altLang="en-US" smtClean="0"/>
-              <a:t>2024/6/3</a:t>
+              <a:t>2024/6/26</a:t>
             </a:fld>
             <a:endParaRPr lang="zh-CN" altLang="en-US"/>
           </a:p>
@@ -1060,7 +1060,7 @@
           <a:p>
             <a:fld id="{B3A1CB8A-CC46-473E-BAED-B264D45A45B1}" type="datetimeFigureOut">
               <a:rPr lang="zh-CN" altLang="en-US" smtClean="0"/>
-              <a:t>2024/6/3</a:t>
+              <a:t>2024/6/26</a:t>
             </a:fld>
             <a:endParaRPr lang="zh-CN" altLang="en-US"/>
           </a:p>
@@ -1246,7 +1246,7 @@
           <a:p>
             <a:fld id="{B3A1CB8A-CC46-473E-BAED-B264D45A45B1}" type="datetimeFigureOut">
               <a:rPr lang="zh-CN" altLang="en-US" smtClean="0"/>
-              <a:t>2024/6/3</a:t>
+              <a:t>2024/6/26</a:t>
             </a:fld>
             <a:endParaRPr lang="zh-CN" altLang="en-US"/>
           </a:p>
@@ -1422,7 +1422,7 @@
           <a:p>
             <a:fld id="{B3A1CB8A-CC46-473E-BAED-B264D45A45B1}" type="datetimeFigureOut">
               <a:rPr lang="zh-CN" altLang="en-US" smtClean="0"/>
-              <a:t>2024/6/3</a:t>
+              <a:t>2024/6/26</a:t>
             </a:fld>
             <a:endParaRPr lang="zh-CN" altLang="en-US"/>
           </a:p>
@@ -1675,7 +1675,7 @@
           <a:p>
             <a:fld id="{B3A1CB8A-CC46-473E-BAED-B264D45A45B1}" type="datetimeFigureOut">
               <a:rPr lang="zh-CN" altLang="en-US" smtClean="0"/>
-              <a:t>2024/6/3</a:t>
+              <a:t>2024/6/26</a:t>
             </a:fld>
             <a:endParaRPr lang="zh-CN" altLang="en-US"/>
           </a:p>
@@ -1912,7 +1912,7 @@
           <a:p>
             <a:fld id="{B3A1CB8A-CC46-473E-BAED-B264D45A45B1}" type="datetimeFigureOut">
               <a:rPr lang="zh-CN" altLang="en-US" smtClean="0"/>
-              <a:t>2024/6/3</a:t>
+              <a:t>2024/6/26</a:t>
             </a:fld>
             <a:endParaRPr lang="zh-CN" altLang="en-US"/>
           </a:p>
@@ -2284,7 +2284,7 @@
           <a:p>
             <a:fld id="{B3A1CB8A-CC46-473E-BAED-B264D45A45B1}" type="datetimeFigureOut">
               <a:rPr lang="zh-CN" altLang="en-US" smtClean="0"/>
-              <a:t>2024/6/3</a:t>
+              <a:t>2024/6/26</a:t>
             </a:fld>
             <a:endParaRPr lang="zh-CN" altLang="en-US"/>
           </a:p>
@@ -2409,7 +2409,7 @@
           <a:p>
             <a:fld id="{B3A1CB8A-CC46-473E-BAED-B264D45A45B1}" type="datetimeFigureOut">
               <a:rPr lang="zh-CN" altLang="en-US" smtClean="0"/>
-              <a:t>2024/6/3</a:t>
+              <a:t>2024/6/26</a:t>
             </a:fld>
             <a:endParaRPr lang="zh-CN" altLang="en-US"/>
           </a:p>
@@ -2512,7 +2512,7 @@
           <a:p>
             <a:fld id="{B3A1CB8A-CC46-473E-BAED-B264D45A45B1}" type="datetimeFigureOut">
               <a:rPr lang="zh-CN" altLang="en-US" smtClean="0"/>
-              <a:t>2024/6/3</a:t>
+              <a:t>2024/6/26</a:t>
             </a:fld>
             <a:endParaRPr lang="zh-CN" altLang="en-US"/>
           </a:p>
@@ -2795,7 +2795,7 @@
           <a:p>
             <a:fld id="{B3A1CB8A-CC46-473E-BAED-B264D45A45B1}" type="datetimeFigureOut">
               <a:rPr lang="zh-CN" altLang="en-US" smtClean="0"/>
-              <a:t>2024/6/3</a:t>
+              <a:t>2024/6/26</a:t>
             </a:fld>
             <a:endParaRPr lang="zh-CN" altLang="en-US"/>
           </a:p>
@@ -3055,7 +3055,7 @@
           <a:p>
             <a:fld id="{B3A1CB8A-CC46-473E-BAED-B264D45A45B1}" type="datetimeFigureOut">
               <a:rPr lang="zh-CN" altLang="en-US" smtClean="0"/>
-              <a:t>2024/6/3</a:t>
+              <a:t>2024/6/26</a:t>
             </a:fld>
             <a:endParaRPr lang="zh-CN" altLang="en-US"/>
           </a:p>
@@ -3274,7 +3274,7 @@
           <a:p>
             <a:fld id="{B3A1CB8A-CC46-473E-BAED-B264D45A45B1}" type="datetimeFigureOut">
               <a:rPr lang="zh-CN" altLang="en-US" smtClean="0"/>
-              <a:t>2024/6/3</a:t>
+              <a:t>2024/6/26</a:t>
             </a:fld>
             <a:endParaRPr lang="zh-CN" altLang="en-US"/>
           </a:p>
@@ -3978,7 +3978,7 @@
                 <a:latin typeface="Constantia" panose="02030602050306030303" pitchFamily="18" charset="0"/>
                 <a:cs typeface="Times" panose="02020603050405020304" pitchFamily="18" charset="0"/>
               </a:rPr>
-              <a:t>June 3, 2024</a:t>
+              <a:t>June 26, 2024</a:t>
             </a:fld>
             <a:endParaRPr lang="zh-CN" altLang="en-US" sz="1400" b="1" dirty="0">
               <a:solidFill>
@@ -4819,7 +4819,7 @@
                 <a:latin typeface="Constantia" panose="02030602050306030303" pitchFamily="18" charset="0"/>
                 <a:cs typeface="Times" panose="02020603050405020304" pitchFamily="18" charset="0"/>
               </a:rPr>
-              <a:t>June 3, 2024</a:t>
+              <a:t>June 26, 2024</a:t>
             </a:fld>
             <a:endParaRPr lang="zh-CN" altLang="en-US" sz="1400" b="1" dirty="0">
               <a:solidFill>
